--- a/黒崎/AI研修一覧/A-107_AI時代の情報リテラシー/スライド.pptx
+++ b/黒崎/AI研修一覧/A-107_AI時代の情報リテラシー/スライド.pptx
@@ -2149,14 +2149,16 @@
           <a:ln/>
         </p:spPr>
         <p:txBody>
-          <a:bodyPr wrap="square" lIns="0" tIns="0" rIns="0" bIns="0" rtlCol="0" anchor="ctr"/>
+          <a:bodyPr wrap="square" lIns="0" tIns="0" rIns="0" bIns="0" rtlCol="0" anchor="ctr">
+            <a:normAutofit/>
+          </a:bodyPr>
           <a:lstStyle/>
           <a:p>
             <a:pPr indent="0" marL="0">
               <a:buNone/>
             </a:pPr>
             <a:r>
-              <a:rPr lang="en-US" sz="3200" b="1" dirty="0">
+              <a:rPr lang="en-US" sz="2200" b="1" dirty="0">
                 <a:solidFill>
                   <a:srgbClr val="111827"/>
                 </a:solidFill>
@@ -2166,7 +2168,7 @@
               </a:rPr>
               <a:t>日常業務で使える5つのテクニック</a:t>
             </a:r>
-            <a:endParaRPr lang="en-US" sz="3200" dirty="0"/>
+            <a:endParaRPr lang="en-US" sz="2200" dirty="0"/>
           </a:p>
         </p:txBody>
       </p:sp>
@@ -2279,7 +2281,7 @@
         </p:nvSpPr>
         <p:spPr>
           <a:xfrm>
-            <a:off x="777240" y="1143000"/>
+            <a:off x="777240" y="1417320"/>
             <a:ext cx="411480" cy="411480"/>
           </a:xfrm>
           <a:prstGeom prst="ellipse">
@@ -2320,7 +2322,7 @@
         </p:nvSpPr>
         <p:spPr>
           <a:xfrm>
-            <a:off x="1371600" y="1097280"/>
+            <a:off x="1371600" y="1371600"/>
             <a:ext cx="6858000" cy="502920"/>
           </a:xfrm>
           <a:prstGeom prst="rect">
@@ -2359,7 +2361,7 @@
         </p:nvSpPr>
         <p:spPr>
           <a:xfrm>
-            <a:off x="777240" y="1801368"/>
+            <a:off x="777240" y="2011680"/>
             <a:ext cx="411480" cy="411480"/>
           </a:xfrm>
           <a:prstGeom prst="ellipse">
@@ -2400,7 +2402,7 @@
         </p:nvSpPr>
         <p:spPr>
           <a:xfrm>
-            <a:off x="1371600" y="1755648"/>
+            <a:off x="1371600" y="1965960"/>
             <a:ext cx="6858000" cy="502920"/>
           </a:xfrm>
           <a:prstGeom prst="rect">
@@ -2439,7 +2441,7 @@
         </p:nvSpPr>
         <p:spPr>
           <a:xfrm>
-            <a:off x="777240" y="2459736"/>
+            <a:off x="777240" y="2606040"/>
             <a:ext cx="411480" cy="411480"/>
           </a:xfrm>
           <a:prstGeom prst="ellipse">
@@ -2480,7 +2482,7 @@
         </p:nvSpPr>
         <p:spPr>
           <a:xfrm>
-            <a:off x="1371600" y="2414016"/>
+            <a:off x="1371600" y="2560320"/>
             <a:ext cx="6858000" cy="502920"/>
           </a:xfrm>
           <a:prstGeom prst="rect">
@@ -2519,7 +2521,7 @@
         </p:nvSpPr>
         <p:spPr>
           <a:xfrm>
-            <a:off x="777240" y="3118104"/>
+            <a:off x="777240" y="3200400"/>
             <a:ext cx="411480" cy="411480"/>
           </a:xfrm>
           <a:prstGeom prst="ellipse">
@@ -2560,7 +2562,7 @@
         </p:nvSpPr>
         <p:spPr>
           <a:xfrm>
-            <a:off x="1371600" y="3072384"/>
+            <a:off x="1371600" y="3154680"/>
             <a:ext cx="6858000" cy="502920"/>
           </a:xfrm>
           <a:prstGeom prst="rect">
@@ -2599,7 +2601,7 @@
         </p:nvSpPr>
         <p:spPr>
           <a:xfrm>
-            <a:off x="777240" y="3776472"/>
+            <a:off x="777240" y="3794760"/>
             <a:ext cx="411480" cy="411480"/>
           </a:xfrm>
           <a:prstGeom prst="ellipse">
@@ -2640,7 +2642,7 @@
         </p:nvSpPr>
         <p:spPr>
           <a:xfrm>
-            <a:off x="1371600" y="3730752"/>
+            <a:off x="1371600" y="3749040"/>
             <a:ext cx="6858000" cy="502920"/>
           </a:xfrm>
           <a:prstGeom prst="rect">
@@ -2741,14 +2743,16 @@
           <a:ln/>
         </p:spPr>
         <p:txBody>
-          <a:bodyPr wrap="square" lIns="0" tIns="0" rIns="0" bIns="0" rtlCol="0" anchor="ctr"/>
+          <a:bodyPr wrap="square" lIns="0" tIns="0" rIns="0" bIns="0" rtlCol="0" anchor="ctr">
+            <a:normAutofit/>
+          </a:bodyPr>
           <a:lstStyle/>
           <a:p>
             <a:pPr indent="0" marL="0">
               <a:buNone/>
             </a:pPr>
             <a:r>
-              <a:rPr lang="en-US" sz="3200" b="1" dirty="0">
+              <a:rPr lang="en-US" sz="2200" b="1" dirty="0">
                 <a:solidFill>
                   <a:srgbClr val="111827"/>
                 </a:solidFill>
@@ -2758,7 +2762,7 @@
               </a:rPr>
               <a:t>まとめ</a:t>
             </a:r>
-            <a:endParaRPr lang="en-US" sz="3200" dirty="0"/>
+            <a:endParaRPr lang="en-US" sz="2200" dirty="0"/>
           </a:p>
         </p:txBody>
       </p:sp>
@@ -3783,14 +3787,16 @@
           <a:ln/>
         </p:spPr>
         <p:txBody>
-          <a:bodyPr wrap="square" lIns="0" tIns="0" rIns="0" bIns="0" rtlCol="0" anchor="ctr"/>
+          <a:bodyPr wrap="square" lIns="0" tIns="0" rIns="0" bIns="0" rtlCol="0" anchor="ctr">
+            <a:normAutofit/>
+          </a:bodyPr>
           <a:lstStyle/>
           <a:p>
             <a:pPr indent="0" marL="0">
               <a:buNone/>
             </a:pPr>
             <a:r>
-              <a:rPr lang="en-US" sz="3200" b="1" dirty="0">
+              <a:rPr lang="en-US" sz="2200" b="1" dirty="0">
                 <a:solidFill>
                   <a:srgbClr val="111827"/>
                 </a:solidFill>
@@ -3800,7 +3806,7 @@
               </a:rPr>
               <a:t>今日のゴール</a:t>
             </a:r>
-            <a:endParaRPr lang="en-US" sz="3200" dirty="0"/>
+            <a:endParaRPr lang="en-US" sz="2200" dirty="0"/>
           </a:p>
         </p:txBody>
       </p:sp>
@@ -4322,14 +4328,16 @@
           <a:ln/>
         </p:spPr>
         <p:txBody>
-          <a:bodyPr wrap="square" lIns="0" tIns="0" rIns="0" bIns="0" rtlCol="0" anchor="ctr"/>
+          <a:bodyPr wrap="square" lIns="0" tIns="0" rIns="0" bIns="0" rtlCol="0" anchor="ctr">
+            <a:normAutofit/>
+          </a:bodyPr>
           <a:lstStyle/>
           <a:p>
             <a:pPr indent="0" marL="0">
               <a:buNone/>
             </a:pPr>
             <a:r>
-              <a:rPr lang="en-US" sz="3200" b="1" dirty="0">
+              <a:rPr lang="en-US" sz="2200" b="1" dirty="0">
                 <a:solidFill>
                   <a:srgbClr val="111827"/>
                 </a:solidFill>
@@ -4339,7 +4347,7 @@
               </a:rPr>
               <a:t>ハルシネーション — AIの「もっともらしいウソ」</a:t>
             </a:r>
-            <a:endParaRPr lang="en-US" sz="3200" dirty="0"/>
+            <a:endParaRPr lang="en-US" sz="2200" dirty="0"/>
           </a:p>
         </p:txBody>
       </p:sp>
@@ -4452,8 +4460,8 @@
         </p:nvSpPr>
         <p:spPr>
           <a:xfrm>
-            <a:off x="800100" y="1188720"/>
-            <a:ext cx="2331720" cy="2377440"/>
+            <a:off x="800100" y="1371600"/>
+            <a:ext cx="2331720" cy="2194560"/>
           </a:xfrm>
           <a:prstGeom prst="rect">
             <a:avLst/>
@@ -4477,7 +4485,7 @@
         </p:nvSpPr>
         <p:spPr>
           <a:xfrm>
-            <a:off x="800100" y="1188720"/>
+            <a:off x="800100" y="1371600"/>
             <a:ext cx="2331720" cy="54864"/>
           </a:xfrm>
           <a:prstGeom prst="rect">
@@ -4497,7 +4505,7 @@
         </p:nvSpPr>
         <p:spPr>
           <a:xfrm>
-            <a:off x="1691640" y="1463040"/>
+            <a:off x="1691640" y="1645920"/>
             <a:ext cx="548640" cy="548640"/>
           </a:xfrm>
           <a:prstGeom prst="ellipse">
@@ -4525,7 +4533,7 @@
         </p:blipFill>
         <p:spPr>
           <a:xfrm>
-            <a:off x="1805940" y="1581912"/>
+            <a:off x="1805940" y="1764792"/>
             <a:ext cx="320040" cy="320040"/>
           </a:xfrm>
           <a:prstGeom prst="rect">
@@ -4541,7 +4549,7 @@
         </p:nvSpPr>
         <p:spPr>
           <a:xfrm>
-            <a:off x="800100" y="2194560"/>
+            <a:off x="800100" y="2377440"/>
             <a:ext cx="2331720" cy="365760"/>
           </a:xfrm>
           <a:prstGeom prst="rect">
@@ -4580,7 +4588,7 @@
         </p:nvSpPr>
         <p:spPr>
           <a:xfrm>
-            <a:off x="937260" y="2606040"/>
+            <a:off x="937260" y="2788920"/>
             <a:ext cx="2057400" cy="731520"/>
           </a:xfrm>
           <a:prstGeom prst="rect">
@@ -4636,8 +4644,8 @@
         </p:nvSpPr>
         <p:spPr>
           <a:xfrm>
-            <a:off x="3406140" y="1188720"/>
-            <a:ext cx="2331720" cy="2377440"/>
+            <a:off x="3406140" y="1371600"/>
+            <a:ext cx="2331720" cy="2194560"/>
           </a:xfrm>
           <a:prstGeom prst="rect">
             <a:avLst/>
@@ -4661,7 +4669,7 @@
         </p:nvSpPr>
         <p:spPr>
           <a:xfrm>
-            <a:off x="3406140" y="1188720"/>
+            <a:off x="3406140" y="1371600"/>
             <a:ext cx="2331720" cy="54864"/>
           </a:xfrm>
           <a:prstGeom prst="rect">
@@ -4681,7 +4689,7 @@
         </p:nvSpPr>
         <p:spPr>
           <a:xfrm>
-            <a:off x="4297680" y="1463040"/>
+            <a:off x="4297680" y="1645920"/>
             <a:ext cx="548640" cy="548640"/>
           </a:xfrm>
           <a:prstGeom prst="ellipse">
@@ -4709,7 +4717,7 @@
         </p:blipFill>
         <p:spPr>
           <a:xfrm>
-            <a:off x="4411980" y="1581912"/>
+            <a:off x="4411980" y="1764792"/>
             <a:ext cx="320040" cy="320040"/>
           </a:xfrm>
           <a:prstGeom prst="rect">
@@ -4725,7 +4733,7 @@
         </p:nvSpPr>
         <p:spPr>
           <a:xfrm>
-            <a:off x="3406140" y="2194560"/>
+            <a:off x="3406140" y="2377440"/>
             <a:ext cx="2331720" cy="365760"/>
           </a:xfrm>
           <a:prstGeom prst="rect">
@@ -4764,7 +4772,7 @@
         </p:nvSpPr>
         <p:spPr>
           <a:xfrm>
-            <a:off x="3543300" y="2606040"/>
+            <a:off x="3543300" y="2788920"/>
             <a:ext cx="2057400" cy="731520"/>
           </a:xfrm>
           <a:prstGeom prst="rect">
@@ -4820,8 +4828,8 @@
         </p:nvSpPr>
         <p:spPr>
           <a:xfrm>
-            <a:off x="6012180" y="1188720"/>
-            <a:ext cx="2331720" cy="2377440"/>
+            <a:off x="6012180" y="1371600"/>
+            <a:ext cx="2331720" cy="2194560"/>
           </a:xfrm>
           <a:prstGeom prst="rect">
             <a:avLst/>
@@ -4845,7 +4853,7 @@
         </p:nvSpPr>
         <p:spPr>
           <a:xfrm>
-            <a:off x="6012180" y="1188720"/>
+            <a:off x="6012180" y="1371600"/>
             <a:ext cx="2331720" cy="54864"/>
           </a:xfrm>
           <a:prstGeom prst="rect">
@@ -4865,7 +4873,7 @@
         </p:nvSpPr>
         <p:spPr>
           <a:xfrm>
-            <a:off x="6903720" y="1463040"/>
+            <a:off x="6903720" y="1645920"/>
             <a:ext cx="548640" cy="548640"/>
           </a:xfrm>
           <a:prstGeom prst="ellipse">
@@ -4893,7 +4901,7 @@
         </p:blipFill>
         <p:spPr>
           <a:xfrm>
-            <a:off x="7018020" y="1581912"/>
+            <a:off x="7018020" y="1764792"/>
             <a:ext cx="320040" cy="320040"/>
           </a:xfrm>
           <a:prstGeom prst="rect">
@@ -4909,7 +4917,7 @@
         </p:nvSpPr>
         <p:spPr>
           <a:xfrm>
-            <a:off x="6012180" y="2194560"/>
+            <a:off x="6012180" y="2377440"/>
             <a:ext cx="2331720" cy="365760"/>
           </a:xfrm>
           <a:prstGeom prst="rect">
@@ -4948,7 +4956,7 @@
         </p:nvSpPr>
         <p:spPr>
           <a:xfrm>
-            <a:off x="6149340" y="2606040"/>
+            <a:off x="6149340" y="2788920"/>
             <a:ext cx="2057400" cy="731520"/>
           </a:xfrm>
           <a:prstGeom prst="rect">
@@ -5214,14 +5222,16 @@
           <a:ln/>
         </p:spPr>
         <p:txBody>
-          <a:bodyPr wrap="square" lIns="0" tIns="0" rIns="0" bIns="0" rtlCol="0" anchor="ctr"/>
+          <a:bodyPr wrap="square" lIns="0" tIns="0" rIns="0" bIns="0" rtlCol="0" anchor="ctr">
+            <a:normAutofit/>
+          </a:bodyPr>
           <a:lstStyle/>
           <a:p>
             <a:pPr indent="0" marL="0">
               <a:buNone/>
             </a:pPr>
             <a:r>
-              <a:rPr lang="en-US" sz="3200" b="1" dirty="0">
+              <a:rPr lang="en-US" sz="2200" b="1" dirty="0">
                 <a:solidFill>
                   <a:srgbClr val="111827"/>
                 </a:solidFill>
@@ -5231,7 +5241,7 @@
               </a:rPr>
               <a:t>ハルシネーションが起きやすい場面</a:t>
             </a:r>
-            <a:endParaRPr lang="en-US" sz="3200" dirty="0"/>
+            <a:endParaRPr lang="en-US" sz="2200" dirty="0"/>
           </a:p>
         </p:txBody>
       </p:sp>
@@ -6147,14 +6157,16 @@
           <a:ln/>
         </p:spPr>
         <p:txBody>
-          <a:bodyPr wrap="square" lIns="0" tIns="0" rIns="0" bIns="0" rtlCol="0" anchor="ctr"/>
+          <a:bodyPr wrap="square" lIns="0" tIns="0" rIns="0" bIns="0" rtlCol="0" anchor="ctr">
+            <a:normAutofit/>
+          </a:bodyPr>
           <a:lstStyle/>
           <a:p>
             <a:pPr indent="0" marL="0">
               <a:buNone/>
             </a:pPr>
             <a:r>
-              <a:rPr lang="en-US" sz="3200" b="1" dirty="0">
+              <a:rPr lang="en-US" sz="2200" b="1" dirty="0">
                 <a:solidFill>
                   <a:srgbClr val="111827"/>
                 </a:solidFill>
@@ -6164,7 +6176,7 @@
               </a:rPr>
               <a:t>ファクトチェック 3ステップ</a:t>
             </a:r>
-            <a:endParaRPr lang="en-US" sz="3200" dirty="0"/>
+            <a:endParaRPr lang="en-US" sz="2200" dirty="0"/>
           </a:p>
         </p:txBody>
       </p:sp>
@@ -9456,14 +9468,16 @@
           <a:ln/>
         </p:spPr>
         <p:txBody>
-          <a:bodyPr wrap="square" lIns="0" tIns="0" rIns="0" bIns="0" rtlCol="0" anchor="ctr"/>
+          <a:bodyPr wrap="square" lIns="0" tIns="0" rIns="0" bIns="0" rtlCol="0" anchor="ctr">
+            <a:normAutofit/>
+          </a:bodyPr>
           <a:lstStyle/>
           <a:p>
             <a:pPr indent="0" marL="0">
               <a:buNone/>
             </a:pPr>
             <a:r>
-              <a:rPr lang="en-US" sz="3200" b="1" dirty="0">
+              <a:rPr lang="en-US" sz="2200" b="1" dirty="0">
                 <a:solidFill>
                   <a:srgbClr val="111827"/>
                 </a:solidFill>
@@ -9473,7 +9487,7 @@
               </a:rPr>
               <a:t>情報の信頼性を評価する</a:t>
             </a:r>
-            <a:endParaRPr lang="en-US" sz="3200" dirty="0"/>
+            <a:endParaRPr lang="en-US" sz="2200" dirty="0"/>
           </a:p>
         </p:txBody>
       </p:sp>
@@ -9586,7 +9600,7 @@
         </p:nvSpPr>
         <p:spPr>
           <a:xfrm>
-            <a:off x="685800" y="1097280"/>
+            <a:off x="685800" y="1371600"/>
             <a:ext cx="7772400" cy="594360"/>
           </a:xfrm>
           <a:prstGeom prst="rect">
@@ -9606,7 +9620,7 @@
         </p:nvSpPr>
         <p:spPr>
           <a:xfrm>
-            <a:off x="685800" y="1097280"/>
+            <a:off x="685800" y="1371600"/>
             <a:ext cx="1371600" cy="594360"/>
           </a:xfrm>
           <a:prstGeom prst="rect">
@@ -9645,7 +9659,7 @@
         </p:nvSpPr>
         <p:spPr>
           <a:xfrm>
-            <a:off x="2057400" y="1097280"/>
+            <a:off x="2057400" y="1371600"/>
             <a:ext cx="4114800" cy="594360"/>
           </a:xfrm>
           <a:prstGeom prst="rect">
@@ -9684,7 +9698,7 @@
         </p:nvSpPr>
         <p:spPr>
           <a:xfrm>
-            <a:off x="6172200" y="1097280"/>
+            <a:off x="6172200" y="1371600"/>
             <a:ext cx="2286000" cy="594360"/>
           </a:xfrm>
           <a:prstGeom prst="rect">
@@ -9723,7 +9737,7 @@
         </p:nvSpPr>
         <p:spPr>
           <a:xfrm>
-            <a:off x="685800" y="2286000"/>
+            <a:off x="685800" y="2560320"/>
             <a:ext cx="7772400" cy="0"/>
           </a:xfrm>
           <a:prstGeom prst="line">
@@ -9746,7 +9760,7 @@
         </p:nvSpPr>
         <p:spPr>
           <a:xfrm>
-            <a:off x="914400" y="1828800"/>
+            <a:off x="914400" y="2103120"/>
             <a:ext cx="914400" cy="320040"/>
           </a:xfrm>
           <a:prstGeom prst="rect">
@@ -9768,7 +9782,7 @@
         </p:nvSpPr>
         <p:spPr>
           <a:xfrm>
-            <a:off x="914400" y="1828800"/>
+            <a:off x="914400" y="2103120"/>
             <a:ext cx="914400" cy="320040"/>
           </a:xfrm>
           <a:prstGeom prst="rect">
@@ -9807,7 +9821,7 @@
         </p:nvSpPr>
         <p:spPr>
           <a:xfrm>
-            <a:off x="2057400" y="1691640"/>
+            <a:off x="2057400" y="1965960"/>
             <a:ext cx="4114800" cy="594360"/>
           </a:xfrm>
           <a:prstGeom prst="rect">
@@ -9846,7 +9860,7 @@
         </p:nvSpPr>
         <p:spPr>
           <a:xfrm>
-            <a:off x="6172200" y="1691640"/>
+            <a:off x="6172200" y="1965960"/>
             <a:ext cx="2286000" cy="594360"/>
           </a:xfrm>
           <a:prstGeom prst="rect">
@@ -9885,7 +9899,7 @@
         </p:nvSpPr>
         <p:spPr>
           <a:xfrm>
-            <a:off x="685800" y="2880360"/>
+            <a:off x="685800" y="3154680"/>
             <a:ext cx="7772400" cy="0"/>
           </a:xfrm>
           <a:prstGeom prst="line">
@@ -9908,7 +9922,7 @@
         </p:nvSpPr>
         <p:spPr>
           <a:xfrm>
-            <a:off x="914400" y="2423160"/>
+            <a:off x="914400" y="2697480"/>
             <a:ext cx="914400" cy="320040"/>
           </a:xfrm>
           <a:prstGeom prst="rect">
@@ -9930,7 +9944,7 @@
         </p:nvSpPr>
         <p:spPr>
           <a:xfrm>
-            <a:off x="914400" y="2423160"/>
+            <a:off x="914400" y="2697480"/>
             <a:ext cx="914400" cy="320040"/>
           </a:xfrm>
           <a:prstGeom prst="rect">
@@ -9969,7 +9983,7 @@
         </p:nvSpPr>
         <p:spPr>
           <a:xfrm>
-            <a:off x="2057400" y="2286000"/>
+            <a:off x="2057400" y="2560320"/>
             <a:ext cx="4114800" cy="594360"/>
           </a:xfrm>
           <a:prstGeom prst="rect">
@@ -10008,7 +10022,7 @@
         </p:nvSpPr>
         <p:spPr>
           <a:xfrm>
-            <a:off x="6172200" y="2286000"/>
+            <a:off x="6172200" y="2560320"/>
             <a:ext cx="2286000" cy="594360"/>
           </a:xfrm>
           <a:prstGeom prst="rect">
@@ -10047,7 +10061,7 @@
         </p:nvSpPr>
         <p:spPr>
           <a:xfrm>
-            <a:off x="685800" y="3474720"/>
+            <a:off x="685800" y="3749040"/>
             <a:ext cx="7772400" cy="0"/>
           </a:xfrm>
           <a:prstGeom prst="line">
@@ -10070,7 +10084,7 @@
         </p:nvSpPr>
         <p:spPr>
           <a:xfrm>
-            <a:off x="914400" y="3017520"/>
+            <a:off x="914400" y="3291840"/>
             <a:ext cx="914400" cy="320040"/>
           </a:xfrm>
           <a:prstGeom prst="rect">
@@ -10092,7 +10106,7 @@
         </p:nvSpPr>
         <p:spPr>
           <a:xfrm>
-            <a:off x="914400" y="3017520"/>
+            <a:off x="914400" y="3291840"/>
             <a:ext cx="914400" cy="320040"/>
           </a:xfrm>
           <a:prstGeom prst="rect">
@@ -10131,7 +10145,7 @@
         </p:nvSpPr>
         <p:spPr>
           <a:xfrm>
-            <a:off x="2057400" y="2880360"/>
+            <a:off x="2057400" y="3154680"/>
             <a:ext cx="4114800" cy="594360"/>
           </a:xfrm>
           <a:prstGeom prst="rect">
@@ -10170,7 +10184,7 @@
         </p:nvSpPr>
         <p:spPr>
           <a:xfrm>
-            <a:off x="6172200" y="2880360"/>
+            <a:off x="6172200" y="3154680"/>
             <a:ext cx="2286000" cy="594360"/>
           </a:xfrm>
           <a:prstGeom prst="rect">

--- a/黒崎/AI研修一覧/A-107_AI時代の情報リテラシー/スライド.pptx
+++ b/黒崎/AI研修一覧/A-107_AI時代の情報リテラシー/スライド.pptx
@@ -3548,7 +3548,7 @@
                 <a:ea typeface="Calibri" pitchFamily="34" charset="-122"/>
                 <a:cs typeface="Calibri" pitchFamily="34" charset="-120"/>
               </a:rPr>
-              <a:t>確認テスト（5問）</a:t>
+              <a:t>ご視聴ありがとうございました</a:t>
             </a:r>
             <a:endParaRPr lang="en-US" sz="2200" dirty="0"/>
           </a:p>
@@ -3610,7 +3610,7 @@
                 <a:ea typeface="Calibri" pitchFamily="34" charset="-122"/>
                 <a:cs typeface="Calibri" pitchFamily="34" charset="-120"/>
               </a:rPr>
-              <a:t>80%以上の正答で修了</a:t>
+              <a:t>次の動画もぜひご覧ください</a:t>
             </a:r>
             <a:endParaRPr lang="en-US" sz="1800" dirty="0"/>
           </a:p>
